--- a/docs/presentation/HyreKit_pitch.pptx
+++ b/docs/presentation/HyreKit_pitch.pptx
@@ -3609,7 +3609,7 @@
           <a:lstStyle/>
           <a:p>
             <a:r>
-              <a:t>Надёжность. Под нагрузкой пятьдесят одновременных пользователей — ноль ошибок. Пятьдесят одновременных отправок кода в Arena тоже проходят без ошибок. 268 тестов бэкенда с покрытием 83 процента, тесты фронтенда и сквозной браузерный сценарий на 23 шага; всё это гоняет CI на каждый PR. Персональные данные — по 152-ФЗ.</a:t>
+              <a:t>Надёжность. Под нагрузкой пятьдесят одновременных пользователей — ноль ошибок. Пятьдесят одновременных отправок кода в Arena тоже проходят без ошибок. 274 теста бэкенда с покрытием 83 процента, тесты фронтенда и сквозной браузерный сценарий на 23 шага; всё это гоняет CI на каждый PR. Персональные данные — по 152-ФЗ.</a:t>
             </a:r>
           </a:p>
         </p:txBody>
@@ -18131,7 +18131,7 @@
                   <a:schemeClr val="tx1"/>
                 </a:solidFill>
               </a:rPr>
-              <a:t> 268 тестов бэкенда (покрытие 83 %), 39 тестов фронтенда, браузерный e2e — 23 шага</a:t>
+              <a:t> 274 теста бэкенда (покрытие 83 %), 39 тестов фронтенда, браузерный e2e — 23 шага</a:t>
             </a:r>
             <a:endParaRPr lang="ru-RU">
               <a:solidFill>

--- a/docs/presentation/HyreKit_pitch.pptx
+++ b/docs/presentation/HyreKit_pitch.pptx
@@ -3609,7 +3609,7 @@
           <a:lstStyle/>
           <a:p>
             <a:r>
-              <a:t>Надёжность. Под нагрузкой пятьдесят одновременных пользователей — ноль ошибок. Пятьдесят одновременных отправок кода в Arena тоже проходят без ошибок. 274 теста бэкенда с покрытием 83 процента, тесты фронтенда и сквозной браузерный сценарий на 23 шага; всё это гоняет CI на каждый PR. Персональные данные — по 152-ФЗ.</a:t>
+              <a:t>Надёжность. Под нагрузкой пятьдесят одновременных пользователей — ноль ошибок. Пятьдесят одновременных отправок кода в Arena тоже проходят без ошибок. 276 тестов бэкенда с покрытием 83 процента, тесты фронтенда и сквозной браузерный сценарий на 23 шага; всё это гоняет CI на каждый PR. Персональные данные — по 152-ФЗ.</a:t>
             </a:r>
           </a:p>
         </p:txBody>
@@ -18131,7 +18131,7 @@
                   <a:schemeClr val="tx1"/>
                 </a:solidFill>
               </a:rPr>
-              <a:t> 274 теста бэкенда (покрытие 83 %), 39 тестов фронтенда, браузерный e2e — 23 шага</a:t>
+              <a:t> 276 тестов бэкенда (покрытие 83 %), 43 теста фронтенда, браузерный e2e — 23 шага</a:t>
             </a:r>
             <a:endParaRPr lang="ru-RU">
               <a:solidFill>
@@ -26185,7 +26185,7 @@
                   <a:schemeClr val="accent5"/>
                 </a:solidFill>
               </a:rPr>
-              <a:t>грейд, стек, город, формат, участники ФСП — без пересчёта балла</a:t>
+              <a:t>грейд, стек, участники ФСП, минимальный балл — без пересчёта балла</a:t>
             </a:r>
             <a:endParaRPr lang="ru-RU">
               <a:solidFill>
